--- a/Database-Project/Educational_Resource_Final_Presentation.pptx
+++ b/Database-Project/Educational_Resource_Final_Presentation.pptx
@@ -2,21 +2,21 @@
 <file path=ppt/presentation.xml><?xml version="1.0" encoding="utf-8"?>
 <p:presentation xmlns:p="http://schemas.openxmlformats.org/presentationml/2006/main">
   <p:sldMasterIdLst>
-    <p:sldMasterId xmlns:r="http://schemas.openxmlformats.org/officeDocument/2006/relationships" id="2147483648" r:id="R02f5cdcbedc24629"/>
+    <p:sldMasterId xmlns:r="http://schemas.openxmlformats.org/officeDocument/2006/relationships" id="2147483648" r:id="R0837969836f04ffe"/>
   </p:sldMasterIdLst>
   <p:notesMasterIdLst>
-    <p:notesMasterId xmlns:r="http://schemas.openxmlformats.org/officeDocument/2006/relationships" r:id="Rcaafecc256684865"/>
+    <p:notesMasterId xmlns:r="http://schemas.openxmlformats.org/officeDocument/2006/relationships" r:id="Rca29d81f514949f2"/>
   </p:notesMasterIdLst>
   <p:sldIdLst>
-    <p:sldId xmlns:r="http://schemas.openxmlformats.org/officeDocument/2006/relationships" id="256" r:id="Rdfca23c2b52a47e0"/>
-    <p:sldId xmlns:r="http://schemas.openxmlformats.org/officeDocument/2006/relationships" id="257" r:id="R3f3bc10d81664b1d"/>
-    <p:sldId xmlns:r="http://schemas.openxmlformats.org/officeDocument/2006/relationships" id="258" r:id="Rfc6aceabcef047cd"/>
-    <p:sldId xmlns:r="http://schemas.openxmlformats.org/officeDocument/2006/relationships" id="259" r:id="R60ea2a3334644b67"/>
-    <p:sldId xmlns:r="http://schemas.openxmlformats.org/officeDocument/2006/relationships" id="260" r:id="R4acfe5377e5f48f6"/>
-    <p:sldId xmlns:r="http://schemas.openxmlformats.org/officeDocument/2006/relationships" id="261" r:id="R41404ec02f994323"/>
-    <p:sldId xmlns:r="http://schemas.openxmlformats.org/officeDocument/2006/relationships" id="262" r:id="Raafecf51f91d4088"/>
-    <p:sldId xmlns:r="http://schemas.openxmlformats.org/officeDocument/2006/relationships" id="263" r:id="R2581e823c0c445be"/>
-    <p:sldId xmlns:r="http://schemas.openxmlformats.org/officeDocument/2006/relationships" id="264" r:id="R4befe17c3fb04948"/>
+    <p:sldId xmlns:r="http://schemas.openxmlformats.org/officeDocument/2006/relationships" id="256" r:id="R4030fc3993f04e8e"/>
+    <p:sldId xmlns:r="http://schemas.openxmlformats.org/officeDocument/2006/relationships" id="257" r:id="R1a76b1c8a5014a59"/>
+    <p:sldId xmlns:r="http://schemas.openxmlformats.org/officeDocument/2006/relationships" id="258" r:id="R70d9fbc4e87d4f85"/>
+    <p:sldId xmlns:r="http://schemas.openxmlformats.org/officeDocument/2006/relationships" id="259" r:id="R22d2717f6c074bcc"/>
+    <p:sldId xmlns:r="http://schemas.openxmlformats.org/officeDocument/2006/relationships" id="260" r:id="Re8f941db58a24db1"/>
+    <p:sldId xmlns:r="http://schemas.openxmlformats.org/officeDocument/2006/relationships" id="261" r:id="R03eaa47b84fb4965"/>
+    <p:sldId xmlns:r="http://schemas.openxmlformats.org/officeDocument/2006/relationships" id="262" r:id="R4b52d5575dad4131"/>
+    <p:sldId xmlns:r="http://schemas.openxmlformats.org/officeDocument/2006/relationships" id="263" r:id="Rd61bf72de040463e"/>
+    <p:sldId xmlns:r="http://schemas.openxmlformats.org/officeDocument/2006/relationships" id="264" r:id="Ra9c556b87f2741dc"/>
   </p:sldIdLst>
   <p:sldSz cx="12192000" cy="6858000"/>
   <p:notesSz cx="6858000" cy="9144000"/>
@@ -470,7 +470,7 @@
           </a:p>
           <a:p xmlns:a="http://schemas.openxmlformats.org/drawingml/2006/main">
             <a:r>
-              <a:t>Hello. We are Anudari Undrakh, Jose Antonio Horta Herrera, and Louis Ngonzo. Our project is the Educational Resource Management System. It gives a college one searchable place for course materials. In this presentation, we will explain the database design, demonstrate four meaningful SQL queries and a view, and finish with the main challenges and lessons we learned.</a:t>
+              <a:t>Hello. We are Anudari Undrakh and Jose Antonio Horta Herrera. Our project is the Educational Resource Management System. It gives a college one searchable place for course materials. In this presentation, we will explain the database design, demonstrate four meaningful SQL queries and a view, and finish with the main challenges and lessons we learned.</a:t>
             </a:r>
           </a:p>
           <a:p xmlns:a="http://schemas.openxmlformats.org/drawingml/2006/main">
@@ -885,7 +885,7 @@
           <a:lstStyle xmlns:a="http://schemas.openxmlformats.org/drawingml/2006/main"/>
           <a:p xmlns:a="http://schemas.openxmlformats.org/drawingml/2006/main">
             <a:r>
-              <a:t>Presenter: Louis Ngonzo</a:t>
+              <a:t>Presenter: Jose Antonio Horta Herrera</a:t>
             </a:r>
           </a:p>
           <a:p xmlns:a="http://schemas.openxmlformats.org/drawingml/2006/main">
@@ -990,7 +990,7 @@
           <a:lstStyle xmlns:a="http://schemas.openxmlformats.org/drawingml/2006/main"/>
           <a:p xmlns:a="http://schemas.openxmlformats.org/drawingml/2006/main">
             <a:r>
-              <a:t>Presenter: Louis Ngonzo</a:t>
+              <a:t>Presenter: Jose Antonio Horta Herrera</a:t>
             </a:r>
           </a:p>
           <a:p xmlns:a="http://schemas.openxmlformats.org/drawingml/2006/main">
@@ -1428,7 +1428,7 @@
   </p:cSld>
   <p:clrMap bg1="lt1" tx1="dk1" bg2="lt2" tx2="dk2" accent1="accent1" accent2="accent2" accent3="accent3" accent4="accent4" accent5="accent5" accent6="accent6" hlink="hlink" folHlink="folHlink"/>
   <p:sldLayoutIdLst>
-    <p:sldLayoutId xmlns:r="http://schemas.openxmlformats.org/officeDocument/2006/relationships" id="2147483649" r:id="R3b828e197a8e4091"/>
+    <p:sldLayoutId xmlns:r="http://schemas.openxmlformats.org/officeDocument/2006/relationships" id="2147483649" r:id="R8d2c23dafe6b48fe"/>
   </p:sldLayoutIdLst>
   <p:txStyles>
     <p:titleStyle>
@@ -1979,7 +1979,7 @@
           <p:cNvPr id="9" name="cover-accent">
             <a:extLst xmlns:a="http://schemas.openxmlformats.org/drawingml/2006/main">
               <a:ext uri="{FF2B5EF4-FFF2-40B4-BE49-F238E27FC236}">
-                <a16:creationId xmlns:a16="http://schemas.microsoft.com/office/drawing/2014/main" id="{2A0622EA-6D34-4727-8E5C-10CC5F87E5F5}"/>
+                <a16:creationId xmlns:a16="http://schemas.microsoft.com/office/drawing/2014/main" id="{104D614B-7AC2-4D41-813D-89934DBE10BA}"/>
               </a:ext>
             </a:extLst>
           </p:cNvPr>
@@ -2010,7 +2010,7 @@
           <p:cNvPr id="2" name="cover-blue-line">
             <a:extLst xmlns:a="http://schemas.openxmlformats.org/drawingml/2006/main">
               <a:ext uri="{FF2B5EF4-FFF2-40B4-BE49-F238E27FC236}">
-                <a16:creationId xmlns:a16="http://schemas.microsoft.com/office/drawing/2014/main" id="{4C311F4E-8415-4283-A9CB-0943768EE12F}"/>
+                <a16:creationId xmlns:a16="http://schemas.microsoft.com/office/drawing/2014/main" id="{48602C0F-8727-4960-A450-8758764EF2CC}"/>
               </a:ext>
             </a:extLst>
           </p:cNvPr>
@@ -2041,7 +2041,7 @@
           <p:cNvPr id="3" name="cover-course">
             <a:extLst xmlns:a="http://schemas.openxmlformats.org/drawingml/2006/main">
               <a:ext uri="{FF2B5EF4-FFF2-40B4-BE49-F238E27FC236}">
-                <a16:creationId xmlns:a16="http://schemas.microsoft.com/office/drawing/2014/main" id="{250228DA-4DBA-4861-8645-0A2DCE23A589}"/>
+                <a16:creationId xmlns:a16="http://schemas.microsoft.com/office/drawing/2014/main" id="{524CD4F4-58BC-40FF-ACB3-94D8B2118586}"/>
               </a:ext>
             </a:extLst>
           </p:cNvPr>
@@ -2099,7 +2099,7 @@
           <p:cNvPr id="4" name="cover-title">
             <a:extLst xmlns:a="http://schemas.openxmlformats.org/drawingml/2006/main">
               <a:ext uri="{FF2B5EF4-FFF2-40B4-BE49-F238E27FC236}">
-                <a16:creationId xmlns:a16="http://schemas.microsoft.com/office/drawing/2014/main" id="{5CE53855-1934-4B2D-AE65-0BF736647791}"/>
+                <a16:creationId xmlns:a16="http://schemas.microsoft.com/office/drawing/2014/main" id="{95842D75-B5FD-4FC0-A03C-407D0FBB1611}"/>
               </a:ext>
             </a:extLst>
           </p:cNvPr>
@@ -2180,7 +2180,7 @@
           <p:cNvPr id="5" name="cover-subtitle">
             <a:extLst xmlns:a="http://schemas.openxmlformats.org/drawingml/2006/main">
               <a:ext uri="{FF2B5EF4-FFF2-40B4-BE49-F238E27FC236}">
-                <a16:creationId xmlns:a16="http://schemas.microsoft.com/office/drawing/2014/main" id="{CD4C8A3C-2E88-482B-ADEB-7648E284821D}"/>
+                <a16:creationId xmlns:a16="http://schemas.microsoft.com/office/drawing/2014/main" id="{59EBFD2E-E60F-4A6A-83FC-E9E98E9F79A3}"/>
               </a:ext>
             </a:extLst>
           </p:cNvPr>
@@ -2238,7 +2238,7 @@
           <p:cNvPr id="6" name="cover-team">
             <a:extLst xmlns:a="http://schemas.openxmlformats.org/drawingml/2006/main">
               <a:ext uri="{FF2B5EF4-FFF2-40B4-BE49-F238E27FC236}">
-                <a16:creationId xmlns:a16="http://schemas.microsoft.com/office/drawing/2014/main" id="{80F0CE67-2825-475D-8763-18634B1E3DC8}"/>
+                <a16:creationId xmlns:a16="http://schemas.microsoft.com/office/drawing/2014/main" id="{DCF1F596-F6C9-4764-95B2-FB0D1F7721B6}"/>
               </a:ext>
             </a:extLst>
           </p:cNvPr>
@@ -2286,7 +2286,7 @@
                 <a:ea typeface="Arial"/>
                 <a:cs typeface="Arial"/>
               </a:rPr>
-              <a:t>Anudari Undrakh  •  Jose Antonio Horta Herrera  •  Louis Ngonzo</a:t>
+              <a:t>Anudari Undrakh  •  Jose Antonio Horta Herrera</a:t>
             </a:r>
           </a:p>
         </p:txBody>
@@ -2296,7 +2296,7 @@
           <p:cNvPr id="7" name="cover-side-label">
             <a:extLst xmlns:a="http://schemas.openxmlformats.org/drawingml/2006/main">
               <a:ext uri="{FF2B5EF4-FFF2-40B4-BE49-F238E27FC236}">
-                <a16:creationId xmlns:a16="http://schemas.microsoft.com/office/drawing/2014/main" id="{1A20EACB-B567-4AD9-B26A-A6C93C6A9328}"/>
+                <a16:creationId xmlns:a16="http://schemas.microsoft.com/office/drawing/2014/main" id="{00C38B13-3FAB-40D8-B940-111C30C24F02}"/>
               </a:ext>
             </a:extLst>
           </p:cNvPr>
@@ -2377,7 +2377,7 @@
           <p:cNvPr id="8" name="cover-side-metric">
             <a:extLst xmlns:a="http://schemas.openxmlformats.org/drawingml/2006/main">
               <a:ext uri="{FF2B5EF4-FFF2-40B4-BE49-F238E27FC236}">
-                <a16:creationId xmlns:a16="http://schemas.microsoft.com/office/drawing/2014/main" id="{DB4A7D11-DE95-4624-BFEA-A20B006F93AB}"/>
+                <a16:creationId xmlns:a16="http://schemas.microsoft.com/office/drawing/2014/main" id="{F1979BB6-C48C-4430-8252-1498A6EB74C7}"/>
               </a:ext>
             </a:extLst>
           </p:cNvPr>
@@ -2479,7 +2479,7 @@
     </p:spTree>
     <p:extLst>
       <p:ext uri="{BB962C8B-B14F-4D97-AF65-F5344CB8AC3E}">
-        <p14:creationId xmlns:p14="http://schemas.microsoft.com/office/powerpoint/2010/main" val="2075623583"/>
+        <p14:creationId xmlns:p14="http://schemas.microsoft.com/office/powerpoint/2010/main" val="9859174"/>
       </p:ext>
     </p:extLst>
   </p:cSld>
@@ -2510,7 +2510,7 @@
           <p:cNvPr id="23" name="eyebrow-2">
             <a:extLst xmlns:a="http://schemas.openxmlformats.org/drawingml/2006/main">
               <a:ext uri="{FF2B5EF4-FFF2-40B4-BE49-F238E27FC236}">
-                <a16:creationId xmlns:a16="http://schemas.microsoft.com/office/drawing/2014/main" id="{2741B680-42FF-420D-8CD0-44E2251D94FC}"/>
+                <a16:creationId xmlns:a16="http://schemas.microsoft.com/office/drawing/2014/main" id="{04A8381C-73C9-4E9E-92B7-72275269548D}"/>
               </a:ext>
             </a:extLst>
           </p:cNvPr>
@@ -2568,7 +2568,7 @@
           <p:cNvPr id="2" name="title-2">
             <a:extLst xmlns:a="http://schemas.openxmlformats.org/drawingml/2006/main">
               <a:ext uri="{FF2B5EF4-FFF2-40B4-BE49-F238E27FC236}">
-                <a16:creationId xmlns:a16="http://schemas.microsoft.com/office/drawing/2014/main" id="{78267271-AE4D-4B34-BE2E-5627744C400C}"/>
+                <a16:creationId xmlns:a16="http://schemas.microsoft.com/office/drawing/2014/main" id="{307437E7-A8D7-49D8-B06C-5EA8537A827B}"/>
               </a:ext>
             </a:extLst>
           </p:cNvPr>
@@ -2626,7 +2626,7 @@
           <p:cNvPr id="3" name="rule-54-128">
             <a:extLst xmlns:a="http://schemas.openxmlformats.org/drawingml/2006/main">
               <a:ext uri="{FF2B5EF4-FFF2-40B4-BE49-F238E27FC236}">
-                <a16:creationId xmlns:a16="http://schemas.microsoft.com/office/drawing/2014/main" id="{D0F7376B-A275-4F84-BCF7-46EB38A4B234}"/>
+                <a16:creationId xmlns:a16="http://schemas.microsoft.com/office/drawing/2014/main" id="{76EB3DEB-071B-4E6D-A4E5-EB5A25E341E9}"/>
               </a:ext>
             </a:extLst>
           </p:cNvPr>
@@ -2657,7 +2657,7 @@
           <p:cNvPr id="4" name="presenter-2">
             <a:extLst xmlns:a="http://schemas.openxmlformats.org/drawingml/2006/main">
               <a:ext uri="{FF2B5EF4-FFF2-40B4-BE49-F238E27FC236}">
-                <a16:creationId xmlns:a16="http://schemas.microsoft.com/office/drawing/2014/main" id="{3CE4A58E-44BE-4630-9078-6F6B50082D9E}"/>
+                <a16:creationId xmlns:a16="http://schemas.microsoft.com/office/drawing/2014/main" id="{FF074B4F-18F2-4F70-8914-55FEF500B08E}"/>
               </a:ext>
             </a:extLst>
           </p:cNvPr>
@@ -2715,7 +2715,7 @@
           <p:cNvPr id="5" name="slide-number-2">
             <a:extLst xmlns:a="http://schemas.openxmlformats.org/drawingml/2006/main">
               <a:ext uri="{FF2B5EF4-FFF2-40B4-BE49-F238E27FC236}">
-                <a16:creationId xmlns:a16="http://schemas.microsoft.com/office/drawing/2014/main" id="{691CF885-28D7-45E3-A581-92DBCCF3E8B4}"/>
+                <a16:creationId xmlns:a16="http://schemas.microsoft.com/office/drawing/2014/main" id="{CD732679-A1AB-4300-A46B-708DF4E9720E}"/>
               </a:ext>
             </a:extLst>
           </p:cNvPr>
@@ -2773,7 +2773,7 @@
           <p:cNvPr id="6" name="problem-label">
             <a:extLst xmlns:a="http://schemas.openxmlformats.org/drawingml/2006/main">
               <a:ext uri="{FF2B5EF4-FFF2-40B4-BE49-F238E27FC236}">
-                <a16:creationId xmlns:a16="http://schemas.microsoft.com/office/drawing/2014/main" id="{5E49FDA7-D7F2-41CE-8DE1-A88B82152F06}"/>
+                <a16:creationId xmlns:a16="http://schemas.microsoft.com/office/drawing/2014/main" id="{62A3C9AF-09AA-45E2-9589-207DC3EA539B}"/>
               </a:ext>
             </a:extLst>
           </p:cNvPr>
@@ -2831,7 +2831,7 @@
           <p:cNvPr id="7" name="problem-copy">
             <a:extLst xmlns:a="http://schemas.openxmlformats.org/drawingml/2006/main">
               <a:ext uri="{FF2B5EF4-FFF2-40B4-BE49-F238E27FC236}">
-                <a16:creationId xmlns:a16="http://schemas.microsoft.com/office/drawing/2014/main" id="{03AAFE12-FB61-45B7-8048-728227FE14B7}"/>
+                <a16:creationId xmlns:a16="http://schemas.microsoft.com/office/drawing/2014/main" id="{A4AF94AA-F5E3-4E62-9039-9380418878BB}"/>
               </a:ext>
             </a:extLst>
           </p:cNvPr>
@@ -2889,7 +2889,7 @@
           <p:cNvPr id="8" name="outcome-panel">
             <a:extLst xmlns:a="http://schemas.openxmlformats.org/drawingml/2006/main">
               <a:ext uri="{FF2B5EF4-FFF2-40B4-BE49-F238E27FC236}">
-                <a16:creationId xmlns:a16="http://schemas.microsoft.com/office/drawing/2014/main" id="{85F5A6A4-742A-4335-87FF-60793B9FC344}"/>
+                <a16:creationId xmlns:a16="http://schemas.microsoft.com/office/drawing/2014/main" id="{6B982749-7EEA-48BC-85D2-E18CFC919251}"/>
               </a:ext>
             </a:extLst>
           </p:cNvPr>
@@ -2920,7 +2920,7 @@
           <p:cNvPr id="9" name="outcome-label">
             <a:extLst xmlns:a="http://schemas.openxmlformats.org/drawingml/2006/main">
               <a:ext uri="{FF2B5EF4-FFF2-40B4-BE49-F238E27FC236}">
-                <a16:creationId xmlns:a16="http://schemas.microsoft.com/office/drawing/2014/main" id="{551BD3E7-0768-4445-8900-0BA56F658622}"/>
+                <a16:creationId xmlns:a16="http://schemas.microsoft.com/office/drawing/2014/main" id="{BE2A1DEA-5069-43FD-9A5C-D607A31D0815}"/>
               </a:ext>
             </a:extLst>
           </p:cNvPr>
@@ -2978,7 +2978,7 @@
           <p:cNvPr id="10" name="outcome-copy">
             <a:extLst xmlns:a="http://schemas.openxmlformats.org/drawingml/2006/main">
               <a:ext uri="{FF2B5EF4-FFF2-40B4-BE49-F238E27FC236}">
-                <a16:creationId xmlns:a16="http://schemas.microsoft.com/office/drawing/2014/main" id="{6C93E107-DF92-4692-990E-D0DBB18CCB6F}"/>
+                <a16:creationId xmlns:a16="http://schemas.microsoft.com/office/drawing/2014/main" id="{5B6C07DB-F0AB-46E3-8C4A-287FCC0A8161}"/>
               </a:ext>
             </a:extLst>
           </p:cNvPr>
@@ -3036,7 +3036,7 @@
           <p:cNvPr id="11" name="users-label">
             <a:extLst xmlns:a="http://schemas.openxmlformats.org/drawingml/2006/main">
               <a:ext uri="{FF2B5EF4-FFF2-40B4-BE49-F238E27FC236}">
-                <a16:creationId xmlns:a16="http://schemas.microsoft.com/office/drawing/2014/main" id="{D7630798-DBF4-41CB-811A-415031479F85}"/>
+                <a16:creationId xmlns:a16="http://schemas.microsoft.com/office/drawing/2014/main" id="{F09A35B4-2FCB-4A78-9451-11AD08D0BC9D}"/>
               </a:ext>
             </a:extLst>
           </p:cNvPr>
@@ -3094,7 +3094,7 @@
           <p:cNvPr id="12" name="role-0">
             <a:extLst xmlns:a="http://schemas.openxmlformats.org/drawingml/2006/main">
               <a:ext uri="{FF2B5EF4-FFF2-40B4-BE49-F238E27FC236}">
-                <a16:creationId xmlns:a16="http://schemas.microsoft.com/office/drawing/2014/main" id="{37DA80F5-2685-4434-B692-13C10131B1E7}"/>
+                <a16:creationId xmlns:a16="http://schemas.microsoft.com/office/drawing/2014/main" id="{3AF9A320-BA5E-420D-8E8E-670F0F936025}"/>
               </a:ext>
             </a:extLst>
           </p:cNvPr>
@@ -3152,7 +3152,7 @@
           <p:cNvPr id="13" name="purpose-0">
             <a:extLst xmlns:a="http://schemas.openxmlformats.org/drawingml/2006/main">
               <a:ext uri="{FF2B5EF4-FFF2-40B4-BE49-F238E27FC236}">
-                <a16:creationId xmlns:a16="http://schemas.microsoft.com/office/drawing/2014/main" id="{5BD46B53-6E5D-4774-813E-CEE76F5FCF2C}"/>
+                <a16:creationId xmlns:a16="http://schemas.microsoft.com/office/drawing/2014/main" id="{EB3E66DF-FF4D-4E5D-917B-5AD859AF45FF}"/>
               </a:ext>
             </a:extLst>
           </p:cNvPr>
@@ -3210,7 +3210,7 @@
           <p:cNvPr id="14" name="rule-664-275">
             <a:extLst xmlns:a="http://schemas.openxmlformats.org/drawingml/2006/main">
               <a:ext uri="{FF2B5EF4-FFF2-40B4-BE49-F238E27FC236}">
-                <a16:creationId xmlns:a16="http://schemas.microsoft.com/office/drawing/2014/main" id="{BD3588F4-C931-4E41-8C15-8A223D4FBEE2}"/>
+                <a16:creationId xmlns:a16="http://schemas.microsoft.com/office/drawing/2014/main" id="{88CD8A09-011D-44E3-8BF6-2B0EE1D01A52}"/>
               </a:ext>
             </a:extLst>
           </p:cNvPr>
@@ -3241,7 +3241,7 @@
           <p:cNvPr id="15" name="role-1">
             <a:extLst xmlns:a="http://schemas.openxmlformats.org/drawingml/2006/main">
               <a:ext uri="{FF2B5EF4-FFF2-40B4-BE49-F238E27FC236}">
-                <a16:creationId xmlns:a16="http://schemas.microsoft.com/office/drawing/2014/main" id="{FF6A7C1E-D16E-4223-A728-93CC2F3780D3}"/>
+                <a16:creationId xmlns:a16="http://schemas.microsoft.com/office/drawing/2014/main" id="{78C72758-6A10-4AD9-8F41-4A263919E836}"/>
               </a:ext>
             </a:extLst>
           </p:cNvPr>
@@ -3299,7 +3299,7 @@
           <p:cNvPr id="16" name="purpose-1">
             <a:extLst xmlns:a="http://schemas.openxmlformats.org/drawingml/2006/main">
               <a:ext uri="{FF2B5EF4-FFF2-40B4-BE49-F238E27FC236}">
-                <a16:creationId xmlns:a16="http://schemas.microsoft.com/office/drawing/2014/main" id="{678DDE81-C680-4432-B624-86755EAFB9BD}"/>
+                <a16:creationId xmlns:a16="http://schemas.microsoft.com/office/drawing/2014/main" id="{7672834D-4E51-4C9F-BD09-F888BF61E09F}"/>
               </a:ext>
             </a:extLst>
           </p:cNvPr>
@@ -3357,7 +3357,7 @@
           <p:cNvPr id="17" name="rule-664-371">
             <a:extLst xmlns:a="http://schemas.openxmlformats.org/drawingml/2006/main">
               <a:ext uri="{FF2B5EF4-FFF2-40B4-BE49-F238E27FC236}">
-                <a16:creationId xmlns:a16="http://schemas.microsoft.com/office/drawing/2014/main" id="{2FB1722E-B19C-47A7-A9E5-BDB6B4CE37BB}"/>
+                <a16:creationId xmlns:a16="http://schemas.microsoft.com/office/drawing/2014/main" id="{DF8645CD-B919-4BBD-B8FE-C225F926B3CC}"/>
               </a:ext>
             </a:extLst>
           </p:cNvPr>
@@ -3388,7 +3388,7 @@
           <p:cNvPr id="18" name="role-2">
             <a:extLst xmlns:a="http://schemas.openxmlformats.org/drawingml/2006/main">
               <a:ext uri="{FF2B5EF4-FFF2-40B4-BE49-F238E27FC236}">
-                <a16:creationId xmlns:a16="http://schemas.microsoft.com/office/drawing/2014/main" id="{EE998464-6FA7-4E4C-8672-8FE2C8BE8B64}"/>
+                <a16:creationId xmlns:a16="http://schemas.microsoft.com/office/drawing/2014/main" id="{0DDA04D8-C6E1-44BC-8CA3-96B47A49B065}"/>
               </a:ext>
             </a:extLst>
           </p:cNvPr>
@@ -3446,7 +3446,7 @@
           <p:cNvPr id="19" name="purpose-2">
             <a:extLst xmlns:a="http://schemas.openxmlformats.org/drawingml/2006/main">
               <a:ext uri="{FF2B5EF4-FFF2-40B4-BE49-F238E27FC236}">
-                <a16:creationId xmlns:a16="http://schemas.microsoft.com/office/drawing/2014/main" id="{8524B7A1-D604-4527-ACF2-E5CCDDF84C71}"/>
+                <a16:creationId xmlns:a16="http://schemas.microsoft.com/office/drawing/2014/main" id="{6057FCC6-99B7-4CC5-A242-6497C3A1D1AE}"/>
               </a:ext>
             </a:extLst>
           </p:cNvPr>
@@ -3504,7 +3504,7 @@
           <p:cNvPr id="20" name="rule-664-467">
             <a:extLst xmlns:a="http://schemas.openxmlformats.org/drawingml/2006/main">
               <a:ext uri="{FF2B5EF4-FFF2-40B4-BE49-F238E27FC236}">
-                <a16:creationId xmlns:a16="http://schemas.microsoft.com/office/drawing/2014/main" id="{11D21091-488C-4045-84F8-3FAF4D2F5D6B}"/>
+                <a16:creationId xmlns:a16="http://schemas.microsoft.com/office/drawing/2014/main" id="{BA9E1FA5-63F3-4481-9D36-96FB5C4DB234}"/>
               </a:ext>
             </a:extLst>
           </p:cNvPr>
@@ -3535,7 +3535,7 @@
           <p:cNvPr id="21" name="role-3">
             <a:extLst xmlns:a="http://schemas.openxmlformats.org/drawingml/2006/main">
               <a:ext uri="{FF2B5EF4-FFF2-40B4-BE49-F238E27FC236}">
-                <a16:creationId xmlns:a16="http://schemas.microsoft.com/office/drawing/2014/main" id="{E030DE47-8343-4198-9DD9-261F8FF34001}"/>
+                <a16:creationId xmlns:a16="http://schemas.microsoft.com/office/drawing/2014/main" id="{2708B2EA-ECF1-4CC3-A3F3-393A5E6EAED3}"/>
               </a:ext>
             </a:extLst>
           </p:cNvPr>
@@ -3593,7 +3593,7 @@
           <p:cNvPr id="22" name="purpose-3">
             <a:extLst xmlns:a="http://schemas.openxmlformats.org/drawingml/2006/main">
               <a:ext uri="{FF2B5EF4-FFF2-40B4-BE49-F238E27FC236}">
-                <a16:creationId xmlns:a16="http://schemas.microsoft.com/office/drawing/2014/main" id="{CE0A2984-6AB8-4E22-AF2A-64C32A630920}"/>
+                <a16:creationId xmlns:a16="http://schemas.microsoft.com/office/drawing/2014/main" id="{CF89181D-ACC2-49C8-9BB8-F458036BDF33}"/>
               </a:ext>
             </a:extLst>
           </p:cNvPr>
@@ -3649,7 +3649,7 @@
     </p:spTree>
     <p:extLst>
       <p:ext uri="{BB962C8B-B14F-4D97-AF65-F5344CB8AC3E}">
-        <p14:creationId xmlns:p14="http://schemas.microsoft.com/office/powerpoint/2010/main" val="1021434495"/>
+        <p14:creationId xmlns:p14="http://schemas.microsoft.com/office/powerpoint/2010/main" val="1328669542"/>
       </p:ext>
     </p:extLst>
   </p:cSld>
@@ -3684,7 +3684,7 @@
           <p:nvPr/>
         </p:nvPicPr>
         <p:blipFill>
-          <a:blip xmlns:r="http://schemas.openxmlformats.org/officeDocument/2006/relationships" xmlns:a="http://schemas.openxmlformats.org/drawingml/2006/main" r:embed="R566167ef7dc5476e"/>
+          <a:blip xmlns:r="http://schemas.openxmlformats.org/officeDocument/2006/relationships" xmlns:a="http://schemas.openxmlformats.org/drawingml/2006/main" r:embed="R42f159f1aae245f7"/>
           <a:stretch xmlns:a="http://schemas.openxmlformats.org/drawingml/2006/main"/>
         </p:blipFill>
         <p:spPr>
@@ -3702,7 +3702,7 @@
           <p:cNvPr id="2" name="erd-presenter">
             <a:extLst xmlns:a="http://schemas.openxmlformats.org/drawingml/2006/main">
               <a:ext uri="{FF2B5EF4-FFF2-40B4-BE49-F238E27FC236}">
-                <a16:creationId xmlns:a16="http://schemas.microsoft.com/office/drawing/2014/main" id="{C7902186-0B6C-44E7-9A6E-5BAC9CEB4BAF}"/>
+                <a16:creationId xmlns:a16="http://schemas.microsoft.com/office/drawing/2014/main" id="{A1E3DB4C-4628-4580-830B-735CD7012B7C}"/>
               </a:ext>
             </a:extLst>
           </p:cNvPr>
@@ -3760,7 +3760,7 @@
           <p:cNvPr id="3" name="erd-number">
             <a:extLst xmlns:a="http://schemas.openxmlformats.org/drawingml/2006/main">
               <a:ext uri="{FF2B5EF4-FFF2-40B4-BE49-F238E27FC236}">
-                <a16:creationId xmlns:a16="http://schemas.microsoft.com/office/drawing/2014/main" id="{67382202-A5BD-4898-80C9-5853E55BF60B}"/>
+                <a16:creationId xmlns:a16="http://schemas.microsoft.com/office/drawing/2014/main" id="{9C8AB215-B7F1-4FBA-9ACB-F08C32AC8933}"/>
               </a:ext>
             </a:extLst>
           </p:cNvPr>
@@ -3816,7 +3816,7 @@
     </p:spTree>
     <p:extLst>
       <p:ext uri="{BB962C8B-B14F-4D97-AF65-F5344CB8AC3E}">
-        <p14:creationId xmlns:p14="http://schemas.microsoft.com/office/powerpoint/2010/main" val="1364254763"/>
+        <p14:creationId xmlns:p14="http://schemas.microsoft.com/office/powerpoint/2010/main" val="1045093347"/>
       </p:ext>
     </p:extLst>
   </p:cSld>
@@ -3847,7 +3847,7 @@
           <p:cNvPr id="14" name="eyebrow-4">
             <a:extLst xmlns:a="http://schemas.openxmlformats.org/drawingml/2006/main">
               <a:ext uri="{FF2B5EF4-FFF2-40B4-BE49-F238E27FC236}">
-                <a16:creationId xmlns:a16="http://schemas.microsoft.com/office/drawing/2014/main" id="{A12444F8-796D-44A8-B231-41A436A6DC2F}"/>
+                <a16:creationId xmlns:a16="http://schemas.microsoft.com/office/drawing/2014/main" id="{FCE1777A-EBA6-4F76-A31B-541EC1295B4C}"/>
               </a:ext>
             </a:extLst>
           </p:cNvPr>
@@ -3905,7 +3905,7 @@
           <p:cNvPr id="2" name="title-4">
             <a:extLst xmlns:a="http://schemas.openxmlformats.org/drawingml/2006/main">
               <a:ext uri="{FF2B5EF4-FFF2-40B4-BE49-F238E27FC236}">
-                <a16:creationId xmlns:a16="http://schemas.microsoft.com/office/drawing/2014/main" id="{69B1CEBF-861C-455B-B4BE-72E3ADF1C789}"/>
+                <a16:creationId xmlns:a16="http://schemas.microsoft.com/office/drawing/2014/main" id="{7F226403-5D25-42F6-96EF-A582A7C2594A}"/>
               </a:ext>
             </a:extLst>
           </p:cNvPr>
@@ -3963,7 +3963,7 @@
           <p:cNvPr id="3" name="rule-54-128">
             <a:extLst xmlns:a="http://schemas.openxmlformats.org/drawingml/2006/main">
               <a:ext uri="{FF2B5EF4-FFF2-40B4-BE49-F238E27FC236}">
-                <a16:creationId xmlns:a16="http://schemas.microsoft.com/office/drawing/2014/main" id="{05CF12DE-3059-41A3-8E2C-656658A47222}"/>
+                <a16:creationId xmlns:a16="http://schemas.microsoft.com/office/drawing/2014/main" id="{24E1ABDE-9ABA-4D1E-ACC2-4B76A8ECC2ED}"/>
               </a:ext>
             </a:extLst>
           </p:cNvPr>
@@ -3994,7 +3994,7 @@
           <p:cNvPr id="4" name="presenter-4">
             <a:extLst xmlns:a="http://schemas.openxmlformats.org/drawingml/2006/main">
               <a:ext uri="{FF2B5EF4-FFF2-40B4-BE49-F238E27FC236}">
-                <a16:creationId xmlns:a16="http://schemas.microsoft.com/office/drawing/2014/main" id="{D34481C7-94D7-49A1-B549-4859D9AABBD4}"/>
+                <a16:creationId xmlns:a16="http://schemas.microsoft.com/office/drawing/2014/main" id="{9F2D9D58-0409-4D70-A451-78FD0E0D8828}"/>
               </a:ext>
             </a:extLst>
           </p:cNvPr>
@@ -4052,7 +4052,7 @@
           <p:cNvPr id="5" name="slide-number-4">
             <a:extLst xmlns:a="http://schemas.openxmlformats.org/drawingml/2006/main">
               <a:ext uri="{FF2B5EF4-FFF2-40B4-BE49-F238E27FC236}">
-                <a16:creationId xmlns:a16="http://schemas.microsoft.com/office/drawing/2014/main" id="{F22A9A7F-31ED-4A54-A4F6-670B7DD13279}"/>
+                <a16:creationId xmlns:a16="http://schemas.microsoft.com/office/drawing/2014/main" id="{B3BAD4AC-6A7D-4B75-8D33-85BD0736315F}"/>
               </a:ext>
             </a:extLst>
           </p:cNvPr>
@@ -4110,7 +4110,7 @@
           <p:cNvPr id="6" name="q1-question">
             <a:extLst xmlns:a="http://schemas.openxmlformats.org/drawingml/2006/main">
               <a:ext uri="{FF2B5EF4-FFF2-40B4-BE49-F238E27FC236}">
-                <a16:creationId xmlns:a16="http://schemas.microsoft.com/office/drawing/2014/main" id="{AF3A2461-2D4B-40EE-8E3F-2114EAE8B7F6}"/>
+                <a16:creationId xmlns:a16="http://schemas.microsoft.com/office/drawing/2014/main" id="{493E8DDA-7A4B-4628-80D0-AB62D57363D8}"/>
               </a:ext>
             </a:extLst>
           </p:cNvPr>
@@ -4168,7 +4168,7 @@
           <p:cNvPr id="7" name="code-panel-58-198">
             <a:extLst xmlns:a="http://schemas.openxmlformats.org/drawingml/2006/main">
               <a:ext uri="{FF2B5EF4-FFF2-40B4-BE49-F238E27FC236}">
-                <a16:creationId xmlns:a16="http://schemas.microsoft.com/office/drawing/2014/main" id="{83027ACE-77BE-4A61-9053-A3791BFCF08B}"/>
+                <a16:creationId xmlns:a16="http://schemas.microsoft.com/office/drawing/2014/main" id="{6A5C133A-34EA-422C-8D50-9F08DF2583D2}"/>
               </a:ext>
             </a:extLst>
           </p:cNvPr>
@@ -4203,7 +4203,7 @@
           <p:cNvPr id="8" name="code-label-58-198">
             <a:extLst xmlns:a="http://schemas.openxmlformats.org/drawingml/2006/main">
               <a:ext uri="{FF2B5EF4-FFF2-40B4-BE49-F238E27FC236}">
-                <a16:creationId xmlns:a16="http://schemas.microsoft.com/office/drawing/2014/main" id="{6C00F65B-73FE-42EB-9772-6ED679C929EA}"/>
+                <a16:creationId xmlns:a16="http://schemas.microsoft.com/office/drawing/2014/main" id="{136EDE4A-B709-4068-B266-CA4A61E1AF75}"/>
               </a:ext>
             </a:extLst>
           </p:cNvPr>
@@ -4261,7 +4261,7 @@
           <p:cNvPr id="9" name="code-58-198">
             <a:extLst xmlns:a="http://schemas.openxmlformats.org/drawingml/2006/main">
               <a:ext uri="{FF2B5EF4-FFF2-40B4-BE49-F238E27FC236}">
-                <a16:creationId xmlns:a16="http://schemas.microsoft.com/office/drawing/2014/main" id="{CEAAF136-B9C3-406D-B3B5-8CFDA4B428DB}"/>
+                <a16:creationId xmlns:a16="http://schemas.microsoft.com/office/drawing/2014/main" id="{D9F0BE7B-C9E8-4BD3-9D24-5984CEB58917}"/>
               </a:ext>
             </a:extLst>
           </p:cNvPr>
@@ -5017,7 +5017,7 @@
           <p:cNvPr id="11" name="q1-takeaway-panel">
             <a:extLst xmlns:a="http://schemas.openxmlformats.org/drawingml/2006/main">
               <a:ext uri="{FF2B5EF4-FFF2-40B4-BE49-F238E27FC236}">
-                <a16:creationId xmlns:a16="http://schemas.microsoft.com/office/drawing/2014/main" id="{E6457DE3-2014-4782-85EE-2C9F28F506B9}"/>
+                <a16:creationId xmlns:a16="http://schemas.microsoft.com/office/drawing/2014/main" id="{CAE5E8F0-312E-4B3C-98D1-5FA685CF2848}"/>
               </a:ext>
             </a:extLst>
           </p:cNvPr>
@@ -5048,7 +5048,7 @@
           <p:cNvPr id="12" name="q1-takeaway-label">
             <a:extLst xmlns:a="http://schemas.openxmlformats.org/drawingml/2006/main">
               <a:ext uri="{FF2B5EF4-FFF2-40B4-BE49-F238E27FC236}">
-                <a16:creationId xmlns:a16="http://schemas.microsoft.com/office/drawing/2014/main" id="{1DC87BAF-0760-422C-9C83-0E479499CFF1}"/>
+                <a16:creationId xmlns:a16="http://schemas.microsoft.com/office/drawing/2014/main" id="{C380E3D6-5662-4501-AFDD-4FCA5B89617A}"/>
               </a:ext>
             </a:extLst>
           </p:cNvPr>
@@ -5106,7 +5106,7 @@
           <p:cNvPr id="13" name="q1-takeaway">
             <a:extLst xmlns:a="http://schemas.openxmlformats.org/drawingml/2006/main">
               <a:ext uri="{FF2B5EF4-FFF2-40B4-BE49-F238E27FC236}">
-                <a16:creationId xmlns:a16="http://schemas.microsoft.com/office/drawing/2014/main" id="{75259928-AE76-4227-909A-1D761935C276}"/>
+                <a16:creationId xmlns:a16="http://schemas.microsoft.com/office/drawing/2014/main" id="{0D5C3407-DB50-48AD-B342-7A42E4778A03}"/>
               </a:ext>
             </a:extLst>
           </p:cNvPr>
@@ -5162,7 +5162,7 @@
     </p:spTree>
     <p:extLst>
       <p:ext uri="{BB962C8B-B14F-4D97-AF65-F5344CB8AC3E}">
-        <p14:creationId xmlns:p14="http://schemas.microsoft.com/office/powerpoint/2010/main" val="224902849"/>
+        <p14:creationId xmlns:p14="http://schemas.microsoft.com/office/powerpoint/2010/main" val="2016128273"/>
       </p:ext>
     </p:extLst>
   </p:cSld>
@@ -5193,7 +5193,7 @@
           <p:cNvPr id="13" name="eyebrow-5">
             <a:extLst xmlns:a="http://schemas.openxmlformats.org/drawingml/2006/main">
               <a:ext uri="{FF2B5EF4-FFF2-40B4-BE49-F238E27FC236}">
-                <a16:creationId xmlns:a16="http://schemas.microsoft.com/office/drawing/2014/main" id="{8B07FC18-C0AA-4BC2-A17C-A77AA33B963A}"/>
+                <a16:creationId xmlns:a16="http://schemas.microsoft.com/office/drawing/2014/main" id="{62E8A866-E5F9-4AE8-90A5-9F73B86C9F40}"/>
               </a:ext>
             </a:extLst>
           </p:cNvPr>
@@ -5251,7 +5251,7 @@
           <p:cNvPr id="2" name="title-5">
             <a:extLst xmlns:a="http://schemas.openxmlformats.org/drawingml/2006/main">
               <a:ext uri="{FF2B5EF4-FFF2-40B4-BE49-F238E27FC236}">
-                <a16:creationId xmlns:a16="http://schemas.microsoft.com/office/drawing/2014/main" id="{C9DBBEE7-997F-4F7C-9C44-7A03FB0A43C7}"/>
+                <a16:creationId xmlns:a16="http://schemas.microsoft.com/office/drawing/2014/main" id="{FA74745E-F0DC-440E-9FCE-3C67E191E077}"/>
               </a:ext>
             </a:extLst>
           </p:cNvPr>
@@ -5309,7 +5309,7 @@
           <p:cNvPr id="3" name="rule-54-128">
             <a:extLst xmlns:a="http://schemas.openxmlformats.org/drawingml/2006/main">
               <a:ext uri="{FF2B5EF4-FFF2-40B4-BE49-F238E27FC236}">
-                <a16:creationId xmlns:a16="http://schemas.microsoft.com/office/drawing/2014/main" id="{D9EF417F-A908-4B53-BB6F-FEF3BE831852}"/>
+                <a16:creationId xmlns:a16="http://schemas.microsoft.com/office/drawing/2014/main" id="{45FC2790-1266-4DFF-AEDD-51B82CD02902}"/>
               </a:ext>
             </a:extLst>
           </p:cNvPr>
@@ -5340,7 +5340,7 @@
           <p:cNvPr id="4" name="presenter-5">
             <a:extLst xmlns:a="http://schemas.openxmlformats.org/drawingml/2006/main">
               <a:ext uri="{FF2B5EF4-FFF2-40B4-BE49-F238E27FC236}">
-                <a16:creationId xmlns:a16="http://schemas.microsoft.com/office/drawing/2014/main" id="{6D98BBA2-54C9-4319-B0B1-113312380FCE}"/>
+                <a16:creationId xmlns:a16="http://schemas.microsoft.com/office/drawing/2014/main" id="{043D052E-48DF-4339-9740-076F81488FD1}"/>
               </a:ext>
             </a:extLst>
           </p:cNvPr>
@@ -5388,7 +5388,7 @@
                 <a:ea typeface="Arial"/>
                 <a:cs typeface="Arial"/>
               </a:rPr>
-              <a:t>LOUIS NGONZO</a:t>
+              <a:t>JOSE ANTONIO HORTA HERRERA</a:t>
             </a:r>
           </a:p>
         </p:txBody>
@@ -5398,7 +5398,7 @@
           <p:cNvPr id="5" name="slide-number-5">
             <a:extLst xmlns:a="http://schemas.openxmlformats.org/drawingml/2006/main">
               <a:ext uri="{FF2B5EF4-FFF2-40B4-BE49-F238E27FC236}">
-                <a16:creationId xmlns:a16="http://schemas.microsoft.com/office/drawing/2014/main" id="{D56D66D9-46EE-42A4-BE4D-E32941BCDC33}"/>
+                <a16:creationId xmlns:a16="http://schemas.microsoft.com/office/drawing/2014/main" id="{2A09279E-3120-462C-9A58-77D0ED9D31E8}"/>
               </a:ext>
             </a:extLst>
           </p:cNvPr>
@@ -5456,7 +5456,7 @@
           <p:cNvPr id="6" name="q2-question">
             <a:extLst xmlns:a="http://schemas.openxmlformats.org/drawingml/2006/main">
               <a:ext uri="{FF2B5EF4-FFF2-40B4-BE49-F238E27FC236}">
-                <a16:creationId xmlns:a16="http://schemas.microsoft.com/office/drawing/2014/main" id="{EA329C38-69B5-4556-B297-8898CDC39ECA}"/>
+                <a16:creationId xmlns:a16="http://schemas.microsoft.com/office/drawing/2014/main" id="{38BABD79-0FF3-47E2-A4F0-55699DCA7AE4}"/>
               </a:ext>
             </a:extLst>
           </p:cNvPr>
@@ -5514,7 +5514,7 @@
           <p:cNvPr id="7" name="code-panel-58-200">
             <a:extLst xmlns:a="http://schemas.openxmlformats.org/drawingml/2006/main">
               <a:ext uri="{FF2B5EF4-FFF2-40B4-BE49-F238E27FC236}">
-                <a16:creationId xmlns:a16="http://schemas.microsoft.com/office/drawing/2014/main" id="{D564F7C9-3CE8-4A37-A53E-88F9B95652AB}"/>
+                <a16:creationId xmlns:a16="http://schemas.microsoft.com/office/drawing/2014/main" id="{1B5CC8D3-E991-447A-A438-D2C4BF286719}"/>
               </a:ext>
             </a:extLst>
           </p:cNvPr>
@@ -5549,7 +5549,7 @@
           <p:cNvPr id="8" name="code-label-58-200">
             <a:extLst xmlns:a="http://schemas.openxmlformats.org/drawingml/2006/main">
               <a:ext uri="{FF2B5EF4-FFF2-40B4-BE49-F238E27FC236}">
-                <a16:creationId xmlns:a16="http://schemas.microsoft.com/office/drawing/2014/main" id="{67EEA3E0-95D2-489E-993B-DCDEBD1743C0}"/>
+                <a16:creationId xmlns:a16="http://schemas.microsoft.com/office/drawing/2014/main" id="{2CEF6F76-B9F3-4A7A-9DE3-B575E881985D}"/>
               </a:ext>
             </a:extLst>
           </p:cNvPr>
@@ -5607,7 +5607,7 @@
           <p:cNvPr id="9" name="code-58-200">
             <a:extLst xmlns:a="http://schemas.openxmlformats.org/drawingml/2006/main">
               <a:ext uri="{FF2B5EF4-FFF2-40B4-BE49-F238E27FC236}">
-                <a16:creationId xmlns:a16="http://schemas.microsoft.com/office/drawing/2014/main" id="{42578324-7C14-4F19-B355-4F0975335DCB}"/>
+                <a16:creationId xmlns:a16="http://schemas.microsoft.com/office/drawing/2014/main" id="{78F7FBFA-D826-48A2-8E25-7EDB9560E601}"/>
               </a:ext>
             </a:extLst>
           </p:cNvPr>
@@ -6316,7 +6316,7 @@
           <p:cNvPr id="11" name="q2-total-number">
             <a:extLst xmlns:a="http://schemas.openxmlformats.org/drawingml/2006/main">
               <a:ext uri="{FF2B5EF4-FFF2-40B4-BE49-F238E27FC236}">
-                <a16:creationId xmlns:a16="http://schemas.microsoft.com/office/drawing/2014/main" id="{A85E5652-9F9C-4E11-96E6-740A8A6A5EA9}"/>
+                <a16:creationId xmlns:a16="http://schemas.microsoft.com/office/drawing/2014/main" id="{E94F608E-D8D8-4C58-9488-999D7E93C0B4}"/>
               </a:ext>
             </a:extLst>
           </p:cNvPr>
@@ -6374,7 +6374,7 @@
           <p:cNvPr id="12" name="q2-total-label">
             <a:extLst xmlns:a="http://schemas.openxmlformats.org/drawingml/2006/main">
               <a:ext uri="{FF2B5EF4-FFF2-40B4-BE49-F238E27FC236}">
-                <a16:creationId xmlns:a16="http://schemas.microsoft.com/office/drawing/2014/main" id="{43636280-C95B-421B-B37F-2A65291757D2}"/>
+                <a16:creationId xmlns:a16="http://schemas.microsoft.com/office/drawing/2014/main" id="{7F86B821-CB66-41A3-AC97-04D37C258435}"/>
               </a:ext>
             </a:extLst>
           </p:cNvPr>
@@ -6430,7 +6430,7 @@
     </p:spTree>
     <p:extLst>
       <p:ext uri="{BB962C8B-B14F-4D97-AF65-F5344CB8AC3E}">
-        <p14:creationId xmlns:p14="http://schemas.microsoft.com/office/powerpoint/2010/main" val="2046103882"/>
+        <p14:creationId xmlns:p14="http://schemas.microsoft.com/office/powerpoint/2010/main" val="10466701"/>
       </p:ext>
     </p:extLst>
   </p:cSld>
@@ -6461,7 +6461,7 @@
           <p:cNvPr id="13" name="eyebrow-6">
             <a:extLst xmlns:a="http://schemas.openxmlformats.org/drawingml/2006/main">
               <a:ext uri="{FF2B5EF4-FFF2-40B4-BE49-F238E27FC236}">
-                <a16:creationId xmlns:a16="http://schemas.microsoft.com/office/drawing/2014/main" id="{47B537A6-54FF-4795-A38A-C4A6546D8A37}"/>
+                <a16:creationId xmlns:a16="http://schemas.microsoft.com/office/drawing/2014/main" id="{A42EA5E3-432D-4AF5-99FC-5E010ECB1CDD}"/>
               </a:ext>
             </a:extLst>
           </p:cNvPr>
@@ -6519,7 +6519,7 @@
           <p:cNvPr id="2" name="title-6">
             <a:extLst xmlns:a="http://schemas.openxmlformats.org/drawingml/2006/main">
               <a:ext uri="{FF2B5EF4-FFF2-40B4-BE49-F238E27FC236}">
-                <a16:creationId xmlns:a16="http://schemas.microsoft.com/office/drawing/2014/main" id="{135063B1-5DDD-4CD2-A5D8-B0BB0449CC45}"/>
+                <a16:creationId xmlns:a16="http://schemas.microsoft.com/office/drawing/2014/main" id="{F82BE3B3-BDEF-4ECB-80B4-0395A5E54601}"/>
               </a:ext>
             </a:extLst>
           </p:cNvPr>
@@ -6577,7 +6577,7 @@
           <p:cNvPr id="3" name="rule-54-128">
             <a:extLst xmlns:a="http://schemas.openxmlformats.org/drawingml/2006/main">
               <a:ext uri="{FF2B5EF4-FFF2-40B4-BE49-F238E27FC236}">
-                <a16:creationId xmlns:a16="http://schemas.microsoft.com/office/drawing/2014/main" id="{E2619931-1C48-48E6-9060-06E80CE23103}"/>
+                <a16:creationId xmlns:a16="http://schemas.microsoft.com/office/drawing/2014/main" id="{7B6B99F1-0AA5-44AC-8AF9-BEA73A760F79}"/>
               </a:ext>
             </a:extLst>
           </p:cNvPr>
@@ -6608,7 +6608,7 @@
           <p:cNvPr id="4" name="presenter-6">
             <a:extLst xmlns:a="http://schemas.openxmlformats.org/drawingml/2006/main">
               <a:ext uri="{FF2B5EF4-FFF2-40B4-BE49-F238E27FC236}">
-                <a16:creationId xmlns:a16="http://schemas.microsoft.com/office/drawing/2014/main" id="{55D26DDA-8B9A-497A-8944-7314CDEEA715}"/>
+                <a16:creationId xmlns:a16="http://schemas.microsoft.com/office/drawing/2014/main" id="{A00492E5-5985-4A0F-AD29-A873680821E4}"/>
               </a:ext>
             </a:extLst>
           </p:cNvPr>
@@ -6656,7 +6656,7 @@
                 <a:ea typeface="Arial"/>
                 <a:cs typeface="Arial"/>
               </a:rPr>
-              <a:t>LOUIS NGONZO</a:t>
+              <a:t>JOSE ANTONIO HORTA HERRERA</a:t>
             </a:r>
           </a:p>
         </p:txBody>
@@ -6666,7 +6666,7 @@
           <p:cNvPr id="5" name="slide-number-6">
             <a:extLst xmlns:a="http://schemas.openxmlformats.org/drawingml/2006/main">
               <a:ext uri="{FF2B5EF4-FFF2-40B4-BE49-F238E27FC236}">
-                <a16:creationId xmlns:a16="http://schemas.microsoft.com/office/drawing/2014/main" id="{3AC60011-1163-408A-A9F9-AB9106D00707}"/>
+                <a16:creationId xmlns:a16="http://schemas.microsoft.com/office/drawing/2014/main" id="{1BC13674-4D9B-45B6-9563-F0DC7C4B93D5}"/>
               </a:ext>
             </a:extLst>
           </p:cNvPr>
@@ -6724,7 +6724,7 @@
           <p:cNvPr id="6" name="q3-question">
             <a:extLst xmlns:a="http://schemas.openxmlformats.org/drawingml/2006/main">
               <a:ext uri="{FF2B5EF4-FFF2-40B4-BE49-F238E27FC236}">
-                <a16:creationId xmlns:a16="http://schemas.microsoft.com/office/drawing/2014/main" id="{237D9275-CB3C-4F46-AE8F-76907FA6EB3C}"/>
+                <a16:creationId xmlns:a16="http://schemas.microsoft.com/office/drawing/2014/main" id="{9B1A3189-139A-4ACE-AD84-90AF5B85E94B}"/>
               </a:ext>
             </a:extLst>
           </p:cNvPr>
@@ -6782,7 +6782,7 @@
           <p:cNvPr id="7" name="code-panel-58-194">
             <a:extLst xmlns:a="http://schemas.openxmlformats.org/drawingml/2006/main">
               <a:ext uri="{FF2B5EF4-FFF2-40B4-BE49-F238E27FC236}">
-                <a16:creationId xmlns:a16="http://schemas.microsoft.com/office/drawing/2014/main" id="{7EDB5884-A931-4D4B-9821-FC42AD75FF9D}"/>
+                <a16:creationId xmlns:a16="http://schemas.microsoft.com/office/drawing/2014/main" id="{796BDCA1-6717-40CB-9AFE-0DD08EE03424}"/>
               </a:ext>
             </a:extLst>
           </p:cNvPr>
@@ -6817,7 +6817,7 @@
           <p:cNvPr id="8" name="code-label-58-194">
             <a:extLst xmlns:a="http://schemas.openxmlformats.org/drawingml/2006/main">
               <a:ext uri="{FF2B5EF4-FFF2-40B4-BE49-F238E27FC236}">
-                <a16:creationId xmlns:a16="http://schemas.microsoft.com/office/drawing/2014/main" id="{2CC49ACC-1C15-4513-B6DD-22976FA7DDAF}"/>
+                <a16:creationId xmlns:a16="http://schemas.microsoft.com/office/drawing/2014/main" id="{98D0AD92-D4D3-4460-9359-8F441E777D08}"/>
               </a:ext>
             </a:extLst>
           </p:cNvPr>
@@ -6875,7 +6875,7 @@
           <p:cNvPr id="9" name="code-58-194">
             <a:extLst xmlns:a="http://schemas.openxmlformats.org/drawingml/2006/main">
               <a:ext uri="{FF2B5EF4-FFF2-40B4-BE49-F238E27FC236}">
-                <a16:creationId xmlns:a16="http://schemas.microsoft.com/office/drawing/2014/main" id="{5D2ED6A2-F1F1-4C8A-B565-08E9A29D820B}"/>
+                <a16:creationId xmlns:a16="http://schemas.microsoft.com/office/drawing/2014/main" id="{C1F00650-6994-495E-95C1-1C9DDC7EB710}"/>
               </a:ext>
             </a:extLst>
           </p:cNvPr>
@@ -7775,7 +7775,7 @@
           <p:cNvPr id="11" name="q3-takeaway-panel">
             <a:extLst xmlns:a="http://schemas.openxmlformats.org/drawingml/2006/main">
               <a:ext uri="{FF2B5EF4-FFF2-40B4-BE49-F238E27FC236}">
-                <a16:creationId xmlns:a16="http://schemas.microsoft.com/office/drawing/2014/main" id="{32A9B373-D843-4BFE-A9CF-72216F17FBA0}"/>
+                <a16:creationId xmlns:a16="http://schemas.microsoft.com/office/drawing/2014/main" id="{7D3EFBC8-2012-4DED-94F7-5A9B40722B11}"/>
               </a:ext>
             </a:extLst>
           </p:cNvPr>
@@ -7806,7 +7806,7 @@
           <p:cNvPr id="12" name="q3-takeaway">
             <a:extLst xmlns:a="http://schemas.openxmlformats.org/drawingml/2006/main">
               <a:ext uri="{FF2B5EF4-FFF2-40B4-BE49-F238E27FC236}">
-                <a16:creationId xmlns:a16="http://schemas.microsoft.com/office/drawing/2014/main" id="{AD18D2FA-7DBB-4263-8422-A6F80D82010A}"/>
+                <a16:creationId xmlns:a16="http://schemas.microsoft.com/office/drawing/2014/main" id="{6F666F41-7D6F-4287-BA91-2F3583AC464E}"/>
               </a:ext>
             </a:extLst>
           </p:cNvPr>
@@ -7862,7 +7862,7 @@
     </p:spTree>
     <p:extLst>
       <p:ext uri="{BB962C8B-B14F-4D97-AF65-F5344CB8AC3E}">
-        <p14:creationId xmlns:p14="http://schemas.microsoft.com/office/powerpoint/2010/main" val="580531115"/>
+        <p14:creationId xmlns:p14="http://schemas.microsoft.com/office/powerpoint/2010/main" val="1409601112"/>
       </p:ext>
     </p:extLst>
   </p:cSld>
@@ -7893,7 +7893,7 @@
           <p:cNvPr id="17" name="eyebrow-7">
             <a:extLst xmlns:a="http://schemas.openxmlformats.org/drawingml/2006/main">
               <a:ext uri="{FF2B5EF4-FFF2-40B4-BE49-F238E27FC236}">
-                <a16:creationId xmlns:a16="http://schemas.microsoft.com/office/drawing/2014/main" id="{48D9BD6D-A8F0-48D5-A563-78667CEA9CD0}"/>
+                <a16:creationId xmlns:a16="http://schemas.microsoft.com/office/drawing/2014/main" id="{A903F0B0-E9AA-4D7B-91B9-5F03B0AA2867}"/>
               </a:ext>
             </a:extLst>
           </p:cNvPr>
@@ -7951,7 +7951,7 @@
           <p:cNvPr id="2" name="title-7">
             <a:extLst xmlns:a="http://schemas.openxmlformats.org/drawingml/2006/main">
               <a:ext uri="{FF2B5EF4-FFF2-40B4-BE49-F238E27FC236}">
-                <a16:creationId xmlns:a16="http://schemas.microsoft.com/office/drawing/2014/main" id="{963057A0-1BCA-4D41-8900-952A9B173215}"/>
+                <a16:creationId xmlns:a16="http://schemas.microsoft.com/office/drawing/2014/main" id="{911C0026-D3CC-4ADA-8386-081BF428F292}"/>
               </a:ext>
             </a:extLst>
           </p:cNvPr>
@@ -8009,7 +8009,7 @@
           <p:cNvPr id="3" name="rule-54-128">
             <a:extLst xmlns:a="http://schemas.openxmlformats.org/drawingml/2006/main">
               <a:ext uri="{FF2B5EF4-FFF2-40B4-BE49-F238E27FC236}">
-                <a16:creationId xmlns:a16="http://schemas.microsoft.com/office/drawing/2014/main" id="{249E7C63-F54E-43F8-B07A-AD3733602C27}"/>
+                <a16:creationId xmlns:a16="http://schemas.microsoft.com/office/drawing/2014/main" id="{75C368EF-F9BE-4EA4-A61C-A747DC14A6E1}"/>
               </a:ext>
             </a:extLst>
           </p:cNvPr>
@@ -8040,7 +8040,7 @@
           <p:cNvPr id="4" name="presenter-7">
             <a:extLst xmlns:a="http://schemas.openxmlformats.org/drawingml/2006/main">
               <a:ext uri="{FF2B5EF4-FFF2-40B4-BE49-F238E27FC236}">
-                <a16:creationId xmlns:a16="http://schemas.microsoft.com/office/drawing/2014/main" id="{E9245AA7-CF15-40AD-A086-9039879BF5E9}"/>
+                <a16:creationId xmlns:a16="http://schemas.microsoft.com/office/drawing/2014/main" id="{6D54AFB7-2D48-4940-BFD5-B498A236EA1B}"/>
               </a:ext>
             </a:extLst>
           </p:cNvPr>
@@ -8098,7 +8098,7 @@
           <p:cNvPr id="5" name="slide-number-7">
             <a:extLst xmlns:a="http://schemas.openxmlformats.org/drawingml/2006/main">
               <a:ext uri="{FF2B5EF4-FFF2-40B4-BE49-F238E27FC236}">
-                <a16:creationId xmlns:a16="http://schemas.microsoft.com/office/drawing/2014/main" id="{00757F5D-8A66-4C69-B89F-E7FB8ADB3B35}"/>
+                <a16:creationId xmlns:a16="http://schemas.microsoft.com/office/drawing/2014/main" id="{ED60E2CC-9997-45DF-86A4-D3E2E885BFFF}"/>
               </a:ext>
             </a:extLst>
           </p:cNvPr>
@@ -8156,7 +8156,7 @@
           <p:cNvPr id="6" name="view-purpose">
             <a:extLst xmlns:a="http://schemas.openxmlformats.org/drawingml/2006/main">
               <a:ext uri="{FF2B5EF4-FFF2-40B4-BE49-F238E27FC236}">
-                <a16:creationId xmlns:a16="http://schemas.microsoft.com/office/drawing/2014/main" id="{3F097961-AAC7-41CD-8DB5-32132F4B7E4C}"/>
+                <a16:creationId xmlns:a16="http://schemas.microsoft.com/office/drawing/2014/main" id="{458F901B-D7D4-4F09-AA27-3B873BBD7612}"/>
               </a:ext>
             </a:extLst>
           </p:cNvPr>
@@ -8214,7 +8214,7 @@
           <p:cNvPr id="7" name="view-source">
             <a:extLst xmlns:a="http://schemas.openxmlformats.org/drawingml/2006/main">
               <a:ext uri="{FF2B5EF4-FFF2-40B4-BE49-F238E27FC236}">
-                <a16:creationId xmlns:a16="http://schemas.microsoft.com/office/drawing/2014/main" id="{19ED150D-E8E0-4E2B-86C5-F8CDB3A3ED78}"/>
+                <a16:creationId xmlns:a16="http://schemas.microsoft.com/office/drawing/2014/main" id="{2D37981D-0364-48AA-9A54-3C1B56098DCD}"/>
               </a:ext>
             </a:extLst>
           </p:cNvPr>
@@ -8272,7 +8272,7 @@
           <p:cNvPr id="8" name="view-description">
             <a:extLst xmlns:a="http://schemas.openxmlformats.org/drawingml/2006/main">
               <a:ext uri="{FF2B5EF4-FFF2-40B4-BE49-F238E27FC236}">
-                <a16:creationId xmlns:a16="http://schemas.microsoft.com/office/drawing/2014/main" id="{82FF19A0-AC5A-434B-ADB0-2BF09ED379B6}"/>
+                <a16:creationId xmlns:a16="http://schemas.microsoft.com/office/drawing/2014/main" id="{D66A3E19-0DED-47E0-86BA-871DBC09E509}"/>
               </a:ext>
             </a:extLst>
           </p:cNvPr>
@@ -8330,7 +8330,7 @@
           <p:cNvPr id="9" name="rule-58-382">
             <a:extLst xmlns:a="http://schemas.openxmlformats.org/drawingml/2006/main">
               <a:ext uri="{FF2B5EF4-FFF2-40B4-BE49-F238E27FC236}">
-                <a16:creationId xmlns:a16="http://schemas.microsoft.com/office/drawing/2014/main" id="{CA89760E-9713-4E35-BFE4-7130AC134F59}"/>
+                <a16:creationId xmlns:a16="http://schemas.microsoft.com/office/drawing/2014/main" id="{5E4C77F5-9012-4846-AA29-3275BBB88B0E}"/>
               </a:ext>
             </a:extLst>
           </p:cNvPr>
@@ -8361,7 +8361,7 @@
           <p:cNvPr id="10" name="view-users-label">
             <a:extLst xmlns:a="http://schemas.openxmlformats.org/drawingml/2006/main">
               <a:ext uri="{FF2B5EF4-FFF2-40B4-BE49-F238E27FC236}">
-                <a16:creationId xmlns:a16="http://schemas.microsoft.com/office/drawing/2014/main" id="{8B9EA7ED-E9AF-4414-98F6-D6B5255BCAFD}"/>
+                <a16:creationId xmlns:a16="http://schemas.microsoft.com/office/drawing/2014/main" id="{95A9C128-32D5-4AEC-A6A4-26C03A39E487}"/>
               </a:ext>
             </a:extLst>
           </p:cNvPr>
@@ -8419,7 +8419,7 @@
           <p:cNvPr id="11" name="view-users">
             <a:extLst xmlns:a="http://schemas.openxmlformats.org/drawingml/2006/main">
               <a:ext uri="{FF2B5EF4-FFF2-40B4-BE49-F238E27FC236}">
-                <a16:creationId xmlns:a16="http://schemas.microsoft.com/office/drawing/2014/main" id="{37233A59-F46A-4153-A754-DFC196670675}"/>
+                <a16:creationId xmlns:a16="http://schemas.microsoft.com/office/drawing/2014/main" id="{630A5EBC-AFA4-4682-B904-C15D06CBA86A}"/>
               </a:ext>
             </a:extLst>
           </p:cNvPr>
@@ -8477,7 +8477,7 @@
           <p:cNvPr id="12" name="view-benefit">
             <a:extLst xmlns:a="http://schemas.openxmlformats.org/drawingml/2006/main">
               <a:ext uri="{FF2B5EF4-FFF2-40B4-BE49-F238E27FC236}">
-                <a16:creationId xmlns:a16="http://schemas.microsoft.com/office/drawing/2014/main" id="{185FB99A-D903-4A69-8543-DA179EA9D72D}"/>
+                <a16:creationId xmlns:a16="http://schemas.microsoft.com/office/drawing/2014/main" id="{11EF5EDA-6CF0-42DB-904F-29A22229B8D3}"/>
               </a:ext>
             </a:extLst>
           </p:cNvPr>
@@ -8535,7 +8535,7 @@
           <p:cNvPr id="13" name="code-panel-604-158">
             <a:extLst xmlns:a="http://schemas.openxmlformats.org/drawingml/2006/main">
               <a:ext uri="{FF2B5EF4-FFF2-40B4-BE49-F238E27FC236}">
-                <a16:creationId xmlns:a16="http://schemas.microsoft.com/office/drawing/2014/main" id="{4B899B73-496E-4295-B2C7-9BEDC99FD93C}"/>
+                <a16:creationId xmlns:a16="http://schemas.microsoft.com/office/drawing/2014/main" id="{B59C52BE-3FD0-42C8-82FF-D6C67B523284}"/>
               </a:ext>
             </a:extLst>
           </p:cNvPr>
@@ -8570,7 +8570,7 @@
           <p:cNvPr id="14" name="code-label-604-158">
             <a:extLst xmlns:a="http://schemas.openxmlformats.org/drawingml/2006/main">
               <a:ext uri="{FF2B5EF4-FFF2-40B4-BE49-F238E27FC236}">
-                <a16:creationId xmlns:a16="http://schemas.microsoft.com/office/drawing/2014/main" id="{EEFC4196-5C3E-4679-9D9E-B18256432336}"/>
+                <a16:creationId xmlns:a16="http://schemas.microsoft.com/office/drawing/2014/main" id="{674C7B90-9C08-4569-9BC7-0F1B2924265D}"/>
               </a:ext>
             </a:extLst>
           </p:cNvPr>
@@ -8628,7 +8628,7 @@
           <p:cNvPr id="15" name="code-604-158">
             <a:extLst xmlns:a="http://schemas.openxmlformats.org/drawingml/2006/main">
               <a:ext uri="{FF2B5EF4-FFF2-40B4-BE49-F238E27FC236}">
-                <a16:creationId xmlns:a16="http://schemas.microsoft.com/office/drawing/2014/main" id="{27C35E24-40E4-4EED-89B6-E4D48308F935}"/>
+                <a16:creationId xmlns:a16="http://schemas.microsoft.com/office/drawing/2014/main" id="{BD42B7F7-C8F2-405D-8413-D39A576BD3D4}"/>
               </a:ext>
             </a:extLst>
           </p:cNvPr>
@@ -9382,7 +9382,7 @@
     </p:spTree>
     <p:extLst>
       <p:ext uri="{BB962C8B-B14F-4D97-AF65-F5344CB8AC3E}">
-        <p14:creationId xmlns:p14="http://schemas.microsoft.com/office/powerpoint/2010/main" val="1015322831"/>
+        <p14:creationId xmlns:p14="http://schemas.microsoft.com/office/powerpoint/2010/main" val="381477252"/>
       </p:ext>
     </p:extLst>
   </p:cSld>
@@ -9413,7 +9413,7 @@
           <p:cNvPr id="23" name="eyebrow-8">
             <a:extLst xmlns:a="http://schemas.openxmlformats.org/drawingml/2006/main">
               <a:ext uri="{FF2B5EF4-FFF2-40B4-BE49-F238E27FC236}">
-                <a16:creationId xmlns:a16="http://schemas.microsoft.com/office/drawing/2014/main" id="{7A77E71B-D9A6-4831-92E7-DB1DB76F75C8}"/>
+                <a16:creationId xmlns:a16="http://schemas.microsoft.com/office/drawing/2014/main" id="{5249F688-6DB3-4D43-B03D-FF2E9ABBC171}"/>
               </a:ext>
             </a:extLst>
           </p:cNvPr>
@@ -9471,7 +9471,7 @@
           <p:cNvPr id="2" name="title-8">
             <a:extLst xmlns:a="http://schemas.openxmlformats.org/drawingml/2006/main">
               <a:ext uri="{FF2B5EF4-FFF2-40B4-BE49-F238E27FC236}">
-                <a16:creationId xmlns:a16="http://schemas.microsoft.com/office/drawing/2014/main" id="{31AF50F0-72A5-482F-A3BA-C7A330692336}"/>
+                <a16:creationId xmlns:a16="http://schemas.microsoft.com/office/drawing/2014/main" id="{27DAD332-920B-41CE-A264-DD31FD83D8C4}"/>
               </a:ext>
             </a:extLst>
           </p:cNvPr>
@@ -9529,7 +9529,7 @@
           <p:cNvPr id="3" name="rule-54-128">
             <a:extLst xmlns:a="http://schemas.openxmlformats.org/drawingml/2006/main">
               <a:ext uri="{FF2B5EF4-FFF2-40B4-BE49-F238E27FC236}">
-                <a16:creationId xmlns:a16="http://schemas.microsoft.com/office/drawing/2014/main" id="{6516E629-E29B-4198-A9BE-31778909404C}"/>
+                <a16:creationId xmlns:a16="http://schemas.microsoft.com/office/drawing/2014/main" id="{09703AFB-5867-4CE2-9F9F-F4BC91BB338F}"/>
               </a:ext>
             </a:extLst>
           </p:cNvPr>
@@ -9560,7 +9560,7 @@
           <p:cNvPr id="4" name="presenter-8">
             <a:extLst xmlns:a="http://schemas.openxmlformats.org/drawingml/2006/main">
               <a:ext uri="{FF2B5EF4-FFF2-40B4-BE49-F238E27FC236}">
-                <a16:creationId xmlns:a16="http://schemas.microsoft.com/office/drawing/2014/main" id="{D77B4B7B-550D-47CA-8E6D-E23F82CB2137}"/>
+                <a16:creationId xmlns:a16="http://schemas.microsoft.com/office/drawing/2014/main" id="{54BF0F98-D8EA-4E78-92D2-AC8B0F6864BF}"/>
               </a:ext>
             </a:extLst>
           </p:cNvPr>
@@ -9618,7 +9618,7 @@
           <p:cNvPr id="5" name="slide-number-8">
             <a:extLst xmlns:a="http://schemas.openxmlformats.org/drawingml/2006/main">
               <a:ext uri="{FF2B5EF4-FFF2-40B4-BE49-F238E27FC236}">
-                <a16:creationId xmlns:a16="http://schemas.microsoft.com/office/drawing/2014/main" id="{31B6A8FB-11E7-44D2-AAF5-6B4BD8551309}"/>
+                <a16:creationId xmlns:a16="http://schemas.microsoft.com/office/drawing/2014/main" id="{3F3CEFAF-2367-41AA-87FA-D911472B5494}"/>
               </a:ext>
             </a:extLst>
           </p:cNvPr>
@@ -9676,7 +9676,7 @@
           <p:cNvPr id="6" name="challenge-kicker">
             <a:extLst xmlns:a="http://schemas.openxmlformats.org/drawingml/2006/main">
               <a:ext uri="{FF2B5EF4-FFF2-40B4-BE49-F238E27FC236}">
-                <a16:creationId xmlns:a16="http://schemas.microsoft.com/office/drawing/2014/main" id="{C11BBD48-9111-4521-96CD-964104330344}"/>
+                <a16:creationId xmlns:a16="http://schemas.microsoft.com/office/drawing/2014/main" id="{F6A17912-B16A-4B56-BC49-5E44BD9EF266}"/>
               </a:ext>
             </a:extLst>
           </p:cNvPr>
@@ -9734,7 +9734,7 @@
           <p:cNvPr id="7" name="challenge-title">
             <a:extLst xmlns:a="http://schemas.openxmlformats.org/drawingml/2006/main">
               <a:ext uri="{FF2B5EF4-FFF2-40B4-BE49-F238E27FC236}">
-                <a16:creationId xmlns:a16="http://schemas.microsoft.com/office/drawing/2014/main" id="{818034C9-636F-459F-9E30-CD519D1B94C6}"/>
+                <a16:creationId xmlns:a16="http://schemas.microsoft.com/office/drawing/2014/main" id="{099BF0A0-3573-4D61-A651-0C61178C5337}"/>
               </a:ext>
             </a:extLst>
           </p:cNvPr>
@@ -9792,7 +9792,7 @@
           <p:cNvPr id="8" name="challenge-copy">
             <a:extLst xmlns:a="http://schemas.openxmlformats.org/drawingml/2006/main">
               <a:ext uri="{FF2B5EF4-FFF2-40B4-BE49-F238E27FC236}">
-                <a16:creationId xmlns:a16="http://schemas.microsoft.com/office/drawing/2014/main" id="{F0C0033E-E6E8-42AA-8299-88849B984F8C}"/>
+                <a16:creationId xmlns:a16="http://schemas.microsoft.com/office/drawing/2014/main" id="{AC1C2648-9715-4281-8511-357B7FE46B90}"/>
               </a:ext>
             </a:extLst>
           </p:cNvPr>
@@ -9850,7 +9850,7 @@
           <p:cNvPr id="9" name="solution-panel">
             <a:extLst xmlns:a="http://schemas.openxmlformats.org/drawingml/2006/main">
               <a:ext uri="{FF2B5EF4-FFF2-40B4-BE49-F238E27FC236}">
-                <a16:creationId xmlns:a16="http://schemas.microsoft.com/office/drawing/2014/main" id="{D99D2A81-6ABD-4731-8ED7-8585ECB4C4F9}"/>
+                <a16:creationId xmlns:a16="http://schemas.microsoft.com/office/drawing/2014/main" id="{BACE55CB-12B1-47DA-9D40-99B8A0DEBF3C}"/>
               </a:ext>
             </a:extLst>
           </p:cNvPr>
@@ -9881,7 +9881,7 @@
           <p:cNvPr id="10" name="solution-label">
             <a:extLst xmlns:a="http://schemas.openxmlformats.org/drawingml/2006/main">
               <a:ext uri="{FF2B5EF4-FFF2-40B4-BE49-F238E27FC236}">
-                <a16:creationId xmlns:a16="http://schemas.microsoft.com/office/drawing/2014/main" id="{DE9C063F-7DFA-456E-8CE5-5562CD0B9871}"/>
+                <a16:creationId xmlns:a16="http://schemas.microsoft.com/office/drawing/2014/main" id="{8A8A8CEF-F4D3-42C2-AA8D-D497E5CDEF3B}"/>
               </a:ext>
             </a:extLst>
           </p:cNvPr>
@@ -9939,7 +9939,7 @@
           <p:cNvPr id="11" name="solution-copy">
             <a:extLst xmlns:a="http://schemas.openxmlformats.org/drawingml/2006/main">
               <a:ext uri="{FF2B5EF4-FFF2-40B4-BE49-F238E27FC236}">
-                <a16:creationId xmlns:a16="http://schemas.microsoft.com/office/drawing/2014/main" id="{5585A9EB-4174-40FE-A350-9A5F9994068C}"/>
+                <a16:creationId xmlns:a16="http://schemas.microsoft.com/office/drawing/2014/main" id="{8D5FEAB7-D254-498B-AD14-3FA36EFAE1A6}"/>
               </a:ext>
             </a:extLst>
           </p:cNvPr>
@@ -9997,7 +9997,7 @@
           <p:cNvPr id="12" name="rule-630-170">
             <a:extLst xmlns:a="http://schemas.openxmlformats.org/drawingml/2006/main">
               <a:ext uri="{FF2B5EF4-FFF2-40B4-BE49-F238E27FC236}">
-                <a16:creationId xmlns:a16="http://schemas.microsoft.com/office/drawing/2014/main" id="{A4C9BAEF-2AC8-460A-A68B-1FA7DD09212A}"/>
+                <a16:creationId xmlns:a16="http://schemas.microsoft.com/office/drawing/2014/main" id="{C1B93728-ABE6-4A78-8A85-8107CD64CEC8}"/>
               </a:ext>
             </a:extLst>
           </p:cNvPr>
@@ -10028,7 +10028,7 @@
           <p:cNvPr id="13" name="lesson-heading-0">
             <a:extLst xmlns:a="http://schemas.openxmlformats.org/drawingml/2006/main">
               <a:ext uri="{FF2B5EF4-FFF2-40B4-BE49-F238E27FC236}">
-                <a16:creationId xmlns:a16="http://schemas.microsoft.com/office/drawing/2014/main" id="{1F42775A-180B-4D0D-8DDE-BCFFF054528C}"/>
+                <a16:creationId xmlns:a16="http://schemas.microsoft.com/office/drawing/2014/main" id="{DFD33BDF-187A-40DD-98FB-0C13518BF44F}"/>
               </a:ext>
             </a:extLst>
           </p:cNvPr>
@@ -10086,7 +10086,7 @@
           <p:cNvPr id="14" name="lesson-copy-0">
             <a:extLst xmlns:a="http://schemas.openxmlformats.org/drawingml/2006/main">
               <a:ext uri="{FF2B5EF4-FFF2-40B4-BE49-F238E27FC236}">
-                <a16:creationId xmlns:a16="http://schemas.microsoft.com/office/drawing/2014/main" id="{6C9200BA-667F-4D02-AABE-145B93572BCA}"/>
+                <a16:creationId xmlns:a16="http://schemas.microsoft.com/office/drawing/2014/main" id="{B3B0D508-8970-4927-A899-3674F6AFB73E}"/>
               </a:ext>
             </a:extLst>
           </p:cNvPr>
@@ -10144,7 +10144,7 @@
           <p:cNvPr id="15" name="rule-676-352">
             <a:extLst xmlns:a="http://schemas.openxmlformats.org/drawingml/2006/main">
               <a:ext uri="{FF2B5EF4-FFF2-40B4-BE49-F238E27FC236}">
-                <a16:creationId xmlns:a16="http://schemas.microsoft.com/office/drawing/2014/main" id="{541CF2A4-A485-4361-B24A-EBAF7646230F}"/>
+                <a16:creationId xmlns:a16="http://schemas.microsoft.com/office/drawing/2014/main" id="{94DDEA03-489C-42AB-ACB4-0C598E17A661}"/>
               </a:ext>
             </a:extLst>
           </p:cNvPr>
@@ -10175,7 +10175,7 @@
           <p:cNvPr id="16" name="lesson-heading-1">
             <a:extLst xmlns:a="http://schemas.openxmlformats.org/drawingml/2006/main">
               <a:ext uri="{FF2B5EF4-FFF2-40B4-BE49-F238E27FC236}">
-                <a16:creationId xmlns:a16="http://schemas.microsoft.com/office/drawing/2014/main" id="{AA7B5218-F4D1-4712-A714-D4806B29C2D3}"/>
+                <a16:creationId xmlns:a16="http://schemas.microsoft.com/office/drawing/2014/main" id="{30BCE390-CF7E-42CB-8F1C-99178819088B}"/>
               </a:ext>
             </a:extLst>
           </p:cNvPr>
@@ -10233,7 +10233,7 @@
           <p:cNvPr id="17" name="lesson-copy-1">
             <a:extLst xmlns:a="http://schemas.openxmlformats.org/drawingml/2006/main">
               <a:ext uri="{FF2B5EF4-FFF2-40B4-BE49-F238E27FC236}">
-                <a16:creationId xmlns:a16="http://schemas.microsoft.com/office/drawing/2014/main" id="{BA4D5C85-19F6-4E0B-91CE-78AD685BA2DC}"/>
+                <a16:creationId xmlns:a16="http://schemas.microsoft.com/office/drawing/2014/main" id="{A216F21E-0157-4EFD-B1EB-CD85633FDE9A}"/>
               </a:ext>
             </a:extLst>
           </p:cNvPr>
@@ -10291,7 +10291,7 @@
           <p:cNvPr id="18" name="rule-951-352">
             <a:extLst xmlns:a="http://schemas.openxmlformats.org/drawingml/2006/main">
               <a:ext uri="{FF2B5EF4-FFF2-40B4-BE49-F238E27FC236}">
-                <a16:creationId xmlns:a16="http://schemas.microsoft.com/office/drawing/2014/main" id="{C17CBBB2-0F9D-4FF8-8C9A-E1B7749E5573}"/>
+                <a16:creationId xmlns:a16="http://schemas.microsoft.com/office/drawing/2014/main" id="{5901334E-8C97-4FE4-ADA0-A0BCE8DA91EF}"/>
               </a:ext>
             </a:extLst>
           </p:cNvPr>
@@ -10322,7 +10322,7 @@
           <p:cNvPr id="19" name="lesson-heading-2">
             <a:extLst xmlns:a="http://schemas.openxmlformats.org/drawingml/2006/main">
               <a:ext uri="{FF2B5EF4-FFF2-40B4-BE49-F238E27FC236}">
-                <a16:creationId xmlns:a16="http://schemas.microsoft.com/office/drawing/2014/main" id="{60281ABE-BA2A-4CA0-98C5-3D5D63833EE9}"/>
+                <a16:creationId xmlns:a16="http://schemas.microsoft.com/office/drawing/2014/main" id="{77FFC9A1-F016-4B14-A41B-A658FC3A3B66}"/>
               </a:ext>
             </a:extLst>
           </p:cNvPr>
@@ -10380,7 +10380,7 @@
           <p:cNvPr id="20" name="lesson-copy-2">
             <a:extLst xmlns:a="http://schemas.openxmlformats.org/drawingml/2006/main">
               <a:ext uri="{FF2B5EF4-FFF2-40B4-BE49-F238E27FC236}">
-                <a16:creationId xmlns:a16="http://schemas.microsoft.com/office/drawing/2014/main" id="{ED4CFB1A-9CDF-423B-AC27-17750E53C685}"/>
+                <a16:creationId xmlns:a16="http://schemas.microsoft.com/office/drawing/2014/main" id="{B902FF04-CE12-447C-96B6-AC5C6E331EC4}"/>
               </a:ext>
             </a:extLst>
           </p:cNvPr>
@@ -10438,7 +10438,7 @@
           <p:cNvPr id="21" name="lesson-heading-3">
             <a:extLst xmlns:a="http://schemas.openxmlformats.org/drawingml/2006/main">
               <a:ext uri="{FF2B5EF4-FFF2-40B4-BE49-F238E27FC236}">
-                <a16:creationId xmlns:a16="http://schemas.microsoft.com/office/drawing/2014/main" id="{AEEEF7B6-5836-4574-881C-9B2A60D6CEFC}"/>
+                <a16:creationId xmlns:a16="http://schemas.microsoft.com/office/drawing/2014/main" id="{AB06D20F-64C5-4983-A8E5-BFA19AC110B4}"/>
               </a:ext>
             </a:extLst>
           </p:cNvPr>
@@ -10496,7 +10496,7 @@
           <p:cNvPr id="22" name="lesson-copy-3">
             <a:extLst xmlns:a="http://schemas.openxmlformats.org/drawingml/2006/main">
               <a:ext uri="{FF2B5EF4-FFF2-40B4-BE49-F238E27FC236}">
-                <a16:creationId xmlns:a16="http://schemas.microsoft.com/office/drawing/2014/main" id="{33E92CBC-AB56-444C-A58B-8DCEA41B849E}"/>
+                <a16:creationId xmlns:a16="http://schemas.microsoft.com/office/drawing/2014/main" id="{852BF627-6458-4B2E-AF25-8467D3FEE79E}"/>
               </a:ext>
             </a:extLst>
           </p:cNvPr>
@@ -10552,7 +10552,7 @@
     </p:spTree>
     <p:extLst>
       <p:ext uri="{BB962C8B-B14F-4D97-AF65-F5344CB8AC3E}">
-        <p14:creationId xmlns:p14="http://schemas.microsoft.com/office/powerpoint/2010/main" val="648126065"/>
+        <p14:creationId xmlns:p14="http://schemas.microsoft.com/office/powerpoint/2010/main" val="1113540865"/>
       </p:ext>
     </p:extLst>
   </p:cSld>
@@ -10583,7 +10583,7 @@
           <p:cNvPr id="16" name="close-kicker">
             <a:extLst xmlns:a="http://schemas.openxmlformats.org/drawingml/2006/main">
               <a:ext uri="{FF2B5EF4-FFF2-40B4-BE49-F238E27FC236}">
-                <a16:creationId xmlns:a16="http://schemas.microsoft.com/office/drawing/2014/main" id="{1C5061F1-4C58-4ABA-A705-01D7B207CE78}"/>
+                <a16:creationId xmlns:a16="http://schemas.microsoft.com/office/drawing/2014/main" id="{7E227185-7FE7-4B1E-86E8-0752BFD4BA92}"/>
               </a:ext>
             </a:extLst>
           </p:cNvPr>
@@ -10641,7 +10641,7 @@
           <p:cNvPr id="2" name="close-title">
             <a:extLst xmlns:a="http://schemas.openxmlformats.org/drawingml/2006/main">
               <a:ext uri="{FF2B5EF4-FFF2-40B4-BE49-F238E27FC236}">
-                <a16:creationId xmlns:a16="http://schemas.microsoft.com/office/drawing/2014/main" id="{389FDBA2-F4EC-4051-BDF6-DF491D37575C}"/>
+                <a16:creationId xmlns:a16="http://schemas.microsoft.com/office/drawing/2014/main" id="{9411D7C4-1EE5-417D-9243-F1D7E242F8CA}"/>
               </a:ext>
             </a:extLst>
           </p:cNvPr>
@@ -10699,7 +10699,7 @@
           <p:cNvPr id="3" name="rule-58-350">
             <a:extLst xmlns:a="http://schemas.openxmlformats.org/drawingml/2006/main">
               <a:ext uri="{FF2B5EF4-FFF2-40B4-BE49-F238E27FC236}">
-                <a16:creationId xmlns:a16="http://schemas.microsoft.com/office/drawing/2014/main" id="{B1D8285D-406B-4C7A-940E-F685D8667340}"/>
+                <a16:creationId xmlns:a16="http://schemas.microsoft.com/office/drawing/2014/main" id="{6A773137-79B3-4295-B238-14101CDC01E3}"/>
               </a:ext>
             </a:extLst>
           </p:cNvPr>
@@ -10730,7 +10730,7 @@
           <p:cNvPr id="4" name="close-value-0">
             <a:extLst xmlns:a="http://schemas.openxmlformats.org/drawingml/2006/main">
               <a:ext uri="{FF2B5EF4-FFF2-40B4-BE49-F238E27FC236}">
-                <a16:creationId xmlns:a16="http://schemas.microsoft.com/office/drawing/2014/main" id="{B0D74EB7-789D-47CD-9424-8366285079A4}"/>
+                <a16:creationId xmlns:a16="http://schemas.microsoft.com/office/drawing/2014/main" id="{AC9D654A-055A-4CF5-9967-71BD07CA07E6}"/>
               </a:ext>
             </a:extLst>
           </p:cNvPr>
@@ -10788,7 +10788,7 @@
           <p:cNvPr id="5" name="close-label-0">
             <a:extLst xmlns:a="http://schemas.openxmlformats.org/drawingml/2006/main">
               <a:ext uri="{FF2B5EF4-FFF2-40B4-BE49-F238E27FC236}">
-                <a16:creationId xmlns:a16="http://schemas.microsoft.com/office/drawing/2014/main" id="{4B801462-F932-49A0-8A9C-84138038EE28}"/>
+                <a16:creationId xmlns:a16="http://schemas.microsoft.com/office/drawing/2014/main" id="{20B09F92-C6E5-49A1-B34C-0418FA6EB5D4}"/>
               </a:ext>
             </a:extLst>
           </p:cNvPr>
@@ -10846,7 +10846,7 @@
           <p:cNvPr id="6" name="close-value-1">
             <a:extLst xmlns:a="http://schemas.openxmlformats.org/drawingml/2006/main">
               <a:ext uri="{FF2B5EF4-FFF2-40B4-BE49-F238E27FC236}">
-                <a16:creationId xmlns:a16="http://schemas.microsoft.com/office/drawing/2014/main" id="{9A00E05F-4421-4FEE-841C-A7599286321F}"/>
+                <a16:creationId xmlns:a16="http://schemas.microsoft.com/office/drawing/2014/main" id="{911BA6B7-59C0-49C6-80F4-49D92E323B07}"/>
               </a:ext>
             </a:extLst>
           </p:cNvPr>
@@ -10904,7 +10904,7 @@
           <p:cNvPr id="7" name="close-label-1">
             <a:extLst xmlns:a="http://schemas.openxmlformats.org/drawingml/2006/main">
               <a:ext uri="{FF2B5EF4-FFF2-40B4-BE49-F238E27FC236}">
-                <a16:creationId xmlns:a16="http://schemas.microsoft.com/office/drawing/2014/main" id="{962D391B-C9C5-4F3A-965A-F6C40337BB6A}"/>
+                <a16:creationId xmlns:a16="http://schemas.microsoft.com/office/drawing/2014/main" id="{B1A7DF4B-D50F-4577-BE6F-8DEFD1722CE5}"/>
               </a:ext>
             </a:extLst>
           </p:cNvPr>
@@ -10962,7 +10962,7 @@
           <p:cNvPr id="8" name="close-value-2">
             <a:extLst xmlns:a="http://schemas.openxmlformats.org/drawingml/2006/main">
               <a:ext uri="{FF2B5EF4-FFF2-40B4-BE49-F238E27FC236}">
-                <a16:creationId xmlns:a16="http://schemas.microsoft.com/office/drawing/2014/main" id="{91AB5353-F23D-403A-96F4-CBC6F981B65B}"/>
+                <a16:creationId xmlns:a16="http://schemas.microsoft.com/office/drawing/2014/main" id="{238D4861-9B16-42F4-B4A6-0F1085447078}"/>
               </a:ext>
             </a:extLst>
           </p:cNvPr>
@@ -11020,7 +11020,7 @@
           <p:cNvPr id="9" name="close-label-2">
             <a:extLst xmlns:a="http://schemas.openxmlformats.org/drawingml/2006/main">
               <a:ext uri="{FF2B5EF4-FFF2-40B4-BE49-F238E27FC236}">
-                <a16:creationId xmlns:a16="http://schemas.microsoft.com/office/drawing/2014/main" id="{F886D4CB-D7E3-411E-A976-F89C602647F5}"/>
+                <a16:creationId xmlns:a16="http://schemas.microsoft.com/office/drawing/2014/main" id="{991036BC-8989-4548-9D19-FD6C60700CE9}"/>
               </a:ext>
             </a:extLst>
           </p:cNvPr>
@@ -11078,7 +11078,7 @@
           <p:cNvPr id="10" name="close-value-3">
             <a:extLst xmlns:a="http://schemas.openxmlformats.org/drawingml/2006/main">
               <a:ext uri="{FF2B5EF4-FFF2-40B4-BE49-F238E27FC236}">
-                <a16:creationId xmlns:a16="http://schemas.microsoft.com/office/drawing/2014/main" id="{62362A02-DF8E-4213-B4C7-F1F1ECDC67EC}"/>
+                <a16:creationId xmlns:a16="http://schemas.microsoft.com/office/drawing/2014/main" id="{E241DBE0-5607-445C-A096-7D439C7F0A78}"/>
               </a:ext>
             </a:extLst>
           </p:cNvPr>
@@ -11136,7 +11136,7 @@
           <p:cNvPr id="11" name="close-label-3">
             <a:extLst xmlns:a="http://schemas.openxmlformats.org/drawingml/2006/main">
               <a:ext uri="{FF2B5EF4-FFF2-40B4-BE49-F238E27FC236}">
-                <a16:creationId xmlns:a16="http://schemas.microsoft.com/office/drawing/2014/main" id="{878A0416-9DB6-4930-8649-A8E76D82D6E9}"/>
+                <a16:creationId xmlns:a16="http://schemas.microsoft.com/office/drawing/2014/main" id="{5EE2D6BD-5145-4122-A826-665B2907F518}"/>
               </a:ext>
             </a:extLst>
           </p:cNvPr>
@@ -11194,7 +11194,7 @@
           <p:cNvPr id="12" name="close-next">
             <a:extLst xmlns:a="http://schemas.openxmlformats.org/drawingml/2006/main">
               <a:ext uri="{FF2B5EF4-FFF2-40B4-BE49-F238E27FC236}">
-                <a16:creationId xmlns:a16="http://schemas.microsoft.com/office/drawing/2014/main" id="{0B92C1BA-332C-4C7F-A97D-A86C6AC4D070}"/>
+                <a16:creationId xmlns:a16="http://schemas.microsoft.com/office/drawing/2014/main" id="{27849B82-0382-4AB8-8DDD-DFA546889676}"/>
               </a:ext>
             </a:extLst>
           </p:cNvPr>
@@ -11252,7 +11252,7 @@
           <p:cNvPr id="13" name="close-repo-label">
             <a:extLst xmlns:a="http://schemas.openxmlformats.org/drawingml/2006/main">
               <a:ext uri="{FF2B5EF4-FFF2-40B4-BE49-F238E27FC236}">
-                <a16:creationId xmlns:a16="http://schemas.microsoft.com/office/drawing/2014/main" id="{636F74D1-634C-47EE-A283-F21702F2B6BC}"/>
+                <a16:creationId xmlns:a16="http://schemas.microsoft.com/office/drawing/2014/main" id="{0EF7889D-0BFD-4B0B-9B9C-8B52DA7728BA}"/>
               </a:ext>
             </a:extLst>
           </p:cNvPr>
@@ -11310,7 +11310,7 @@
           <p:cNvPr id="14" name="close-repo">
             <a:extLst xmlns:a="http://schemas.openxmlformats.org/drawingml/2006/main">
               <a:ext uri="{FF2B5EF4-FFF2-40B4-BE49-F238E27FC236}">
-                <a16:creationId xmlns:a16="http://schemas.microsoft.com/office/drawing/2014/main" id="{85C0CAC0-4F65-489A-8C57-7A73437A9F57}"/>
+                <a16:creationId xmlns:a16="http://schemas.microsoft.com/office/drawing/2014/main" id="{E9029484-4914-4546-8B79-888B052D46F7}"/>
               </a:ext>
             </a:extLst>
           </p:cNvPr>
@@ -11368,7 +11368,7 @@
           <p:cNvPr id="15" name="close-presenter">
             <a:extLst xmlns:a="http://schemas.openxmlformats.org/drawingml/2006/main">
               <a:ext uri="{FF2B5EF4-FFF2-40B4-BE49-F238E27FC236}">
-                <a16:creationId xmlns:a16="http://schemas.microsoft.com/office/drawing/2014/main" id="{6368ED1B-9D64-4EA3-BF12-D6FE3AF4F215}"/>
+                <a16:creationId xmlns:a16="http://schemas.microsoft.com/office/drawing/2014/main" id="{53A23669-CD6D-4329-BFD7-1993656E620C}"/>
               </a:ext>
             </a:extLst>
           </p:cNvPr>
@@ -11424,7 +11424,7 @@
     </p:spTree>
     <p:extLst>
       <p:ext uri="{BB962C8B-B14F-4D97-AF65-F5344CB8AC3E}">
-        <p14:creationId xmlns:p14="http://schemas.microsoft.com/office/powerpoint/2010/main" val="1572412558"/>
+        <p14:creationId xmlns:p14="http://schemas.microsoft.com/office/powerpoint/2010/main" val="1793344891"/>
       </p:ext>
     </p:extLst>
   </p:cSld>
